--- a/examples/e-flugzeuge/talk/deck.pptx
+++ b/examples/e-flugzeuge/talk/deck.pptx
@@ -597,7 +597,7 @@
           <a:p>
             <a:r>
               <a:rPr lang="en-US" dirty="0"/>
-              <a:t>Im Beispielnetz sind 34 % aller Flüge kürzer als 300 km. Das sind vor allem Regionalverbindungen zwischen Mittelstädten und Drehkreuzen. Erfundene Zahl.</a:t>
+              <a:t>Im Beispielnetz sind 34 % aller Flüge kürzer als 300 km. Das sind vor allem Regionalverbindungen zwischen Mittelstädten und Drehkreuzen. Das Raster zeigt 100 Flüge, 34 sind gefüllt. Erfundene Zahl.</a:t>
             </a:r>
             <a:endParaRPr lang="en-US" dirty="0"/>
           </a:p>
@@ -685,7 +685,7 @@
           <a:p>
             <a:r>
               <a:rPr lang="en-US" dirty="0"/>
-              <a:t>Start und Steigflug verbrauchen den größten Teil der Energie. Auf kurzen Strecken verteilt sich dieser Anteil auf wenige Kilometer: im Beispiel 38 % mehr Kerosin je Sitzkilometer als auf mittlerer Strecke. Erfundene Zahl.</a:t>
+              <a:t>Start und Steigflug verbrauchen den größten Teil der Energie. Auf kurzen Strecken verteilt sich dieser Anteil auf wenige Kilometer: im Beispiel 38 % mehr Kerosin je Sitzkilometer als auf mittlerer Strecke. Das Bild zeigt den Steigflug hervorgehoben. Erfundene Zahl.</a:t>
             </a:r>
             <a:endParaRPr lang="en-US" dirty="0"/>
           </a:p>
@@ -861,7 +861,7 @@
           <a:p>
             <a:r>
               <a:rPr lang="en-US" dirty="0"/>
-              <a:t>Der Startlärm liegt beim E-Flugzeug bei 67 dB, beim Turboprop bei 82 dB. Für Flughäfen in Stadtnähe ist das der zweite Vorteil neben den Kosten. Erfundene Zahlen.</a:t>
+              <a:t>Der Startlärm liegt beim E-Flugzeug bei 67 dB, beim Turboprop bei 82 dB. Die weißen Ringe zeigen die Reichweite des Lärms beim E-Flugzeug, die gepunkteten Ringe den zusätzlichen Bereich beim Turboprop. Erfundene Zahlen.</a:t>
             </a:r>
             <a:endParaRPr lang="en-US" dirty="0"/>
           </a:p>
@@ -1037,7 +1037,7 @@
           <a:p>
             <a:r>
               <a:rPr lang="en-US" dirty="0"/>
-              <a:t>Punktediagramm: 30 Strecken im Beispielnetz, 14 davon (gefüllt) liegen innerhalb von 320 km. Das sind 47 % der Strecken und 38 % der Passagiere. Erfundene Zahlen.</a:t>
+              <a:t>Streckenkarte: 30 Strecken im Beispielnetz, 14 davon (weiß) liegen innerhalb von 320 km. Das sind 47 % der Strecken und 38 % der Passagiere. Erfundene Zahlen.</a:t>
             </a:r>
             <a:endParaRPr lang="en-US" dirty="0"/>
           </a:p>
@@ -1232,7 +1232,7 @@
         <p:spPr>
           <a:xfrm>
             <a:off x="609600" y="2032000"/>
-            <a:ext cx="10972800" cy="1016000"/>
+            <a:ext cx="6096000" cy="2032000"/>
           </a:xfrm>
           <a:prstGeom prst="rect">
             <a:avLst/>
@@ -1306,7 +1306,7 @@
         <p:spPr>
           <a:xfrm>
             <a:off x="609600" y="609600"/>
-            <a:ext cx="10972800" cy="711200"/>
+            <a:ext cx="6096000" cy="1320800"/>
           </a:xfrm>
           <a:prstGeom prst="rect">
             <a:avLst/>
@@ -1380,7 +1380,7 @@
         <p:spPr>
           <a:xfrm>
             <a:off x="609600" y="609600"/>
-            <a:ext cx="10972800" cy="711200"/>
+            <a:ext cx="6096000" cy="1320800"/>
           </a:xfrm>
           <a:prstGeom prst="rect">
             <a:avLst/>
@@ -1716,10 +1716,54 @@
           <a:chExt cx="0" cy="0"/>
         </a:xfrm>
       </p:grpSpPr>
-      <p:sp>
-        <p:nvSpPr>
-          <p:cNvPr id="2" name="Text 0"/>
+      <p:pic>
+        <p:nvPicPr>
+          <p:cNvPr id="2" name="Image 0" descr="Illustration: Elektroflugzeug mit vier Propellern in der Draufsicht über Reichweitenringen">    </p:cNvPr>
+          <p:cNvPicPr>
+            <a:picLocks noChangeAspect="1"/>
+          </p:cNvPicPr>
+          <p:nvPr/>
+        </p:nvPicPr>
+        <p:blipFill>
+          <a:blip r:embed="rId1"/>
+          <a:stretch>
+            <a:fillRect/>
+          </a:stretch>
+        </p:blipFill>
+        <p:spPr>
+          <a:xfrm>
+            <a:off x="0" y="0"/>
+            <a:ext cx="12192000" cy="6858000"/>
+          </a:xfrm>
+          <a:prstGeom prst="rect">
+            <a:avLst/>
+          </a:prstGeom>
+        </p:spPr>
+      </p:pic>
+      <p:sp>
+        <p:nvSpPr>
+          <p:cNvPr id="3" name="Shape 0"/>
           <p:cNvSpPr/>
+          <p:nvPr/>
+        </p:nvSpPr>
+        <p:spPr>
+          <a:xfrm>
+            <a:off x="609600" y="2032000"/>
+            <a:ext cx="6096000" cy="2032000"/>
+          </a:xfrm>
+          <a:prstGeom prst="rect">
+            <a:avLst/>
+          </a:prstGeom>
+          <a:solidFill>
+            <a:srgbClr val="4C2FBF"/>
+          </a:solidFill>
+          <a:ln/>
+        </p:spPr>
+      </p:sp>
+      <p:sp>
+        <p:nvSpPr>
+          <p:cNvPr id="4" name="Text 0"/>
+          <p:cNvSpPr/>
           <p:nvPr>
             <p:ph idx="100" type="title" hasCustomPrompt="1"/>
           </p:nvPr>
@@ -1727,7 +1771,7 @@
         <p:spPr>
           <a:xfrm>
             <a:off x="609600" y="2032000"/>
-            <a:ext cx="10972800" cy="1016000"/>
+            <a:ext cx="6096000" cy="2032000"/>
           </a:xfrm>
           <a:prstGeom prst="rect">
             <a:avLst/>
@@ -1759,19 +1803,21 @@
       </p:sp>
       <p:sp>
         <p:nvSpPr>
-          <p:cNvPr id="3" name="Text 1"/>
+          <p:cNvPr id="5" name="Text 2"/>
           <p:cNvSpPr txBox="1"/>
           <p:nvPr/>
         </p:nvSpPr>
         <p:spPr>
           <a:xfrm>
-            <a:off x="609600" y="3352800"/>
+            <a:off x="609600" y="4267200"/>
             <a:ext cx="6096000" cy="508000"/>
           </a:xfrm>
           <a:prstGeom prst="rect">
             <a:avLst/>
           </a:prstGeom>
-          <a:noFill/>
+          <a:solidFill>
+            <a:srgbClr val="4C2FBF"/>
+          </a:solidFill>
           <a:ln/>
         </p:spPr>
         <p:txBody>
@@ -1821,10 +1867,54 @@
           <a:chExt cx="0" cy="0"/>
         </a:xfrm>
       </p:grpSpPr>
-      <p:sp>
-        <p:nvSpPr>
-          <p:cNvPr id="2" name="Text 0"/>
+      <p:pic>
+        <p:nvPicPr>
+          <p:cNvPr id="2" name="Image 0" descr="Punktraster aus 100 Quadraten, 34 davon weiß gefüllt">    </p:cNvPr>
+          <p:cNvPicPr>
+            <a:picLocks noChangeAspect="1"/>
+          </p:cNvPicPr>
+          <p:nvPr/>
+        </p:nvPicPr>
+        <p:blipFill>
+          <a:blip r:embed="rId1"/>
+          <a:stretch>
+            <a:fillRect/>
+          </a:stretch>
+        </p:blipFill>
+        <p:spPr>
+          <a:xfrm>
+            <a:off x="0" y="0"/>
+            <a:ext cx="12192000" cy="6858000"/>
+          </a:xfrm>
+          <a:prstGeom prst="rect">
+            <a:avLst/>
+          </a:prstGeom>
+        </p:spPr>
+      </p:pic>
+      <p:sp>
+        <p:nvSpPr>
+          <p:cNvPr id="3" name="Shape 0"/>
           <p:cNvSpPr/>
+          <p:nvPr/>
+        </p:nvSpPr>
+        <p:spPr>
+          <a:xfrm>
+            <a:off x="609600" y="609600"/>
+            <a:ext cx="6096000" cy="1320800"/>
+          </a:xfrm>
+          <a:prstGeom prst="rect">
+            <a:avLst/>
+          </a:prstGeom>
+          <a:solidFill>
+            <a:srgbClr val="4C2FBF"/>
+          </a:solidFill>
+          <a:ln/>
+        </p:spPr>
+      </p:sp>
+      <p:sp>
+        <p:nvSpPr>
+          <p:cNvPr id="4" name="Text 0"/>
+          <p:cNvSpPr/>
           <p:nvPr>
             <p:ph idx="100" type="title" hasCustomPrompt="1"/>
           </p:nvPr>
@@ -1832,7 +1922,7 @@
         <p:spPr>
           <a:xfrm>
             <a:off x="609600" y="609600"/>
-            <a:ext cx="10972800" cy="711200"/>
+            <a:ext cx="6096000" cy="1320800"/>
           </a:xfrm>
           <a:prstGeom prst="rect">
             <a:avLst/>
@@ -1864,19 +1954,21 @@
       </p:sp>
       <p:sp>
         <p:nvSpPr>
-          <p:cNvPr id="3" name="Text 1"/>
+          <p:cNvPr id="5" name="Text 2"/>
           <p:cNvSpPr txBox="1"/>
           <p:nvPr/>
         </p:nvSpPr>
         <p:spPr>
           <a:xfrm>
-            <a:off x="609600" y="2438400"/>
-            <a:ext cx="4470400" cy="1524000"/>
-          </a:xfrm>
-          <a:prstGeom prst="rect">
-            <a:avLst/>
-          </a:prstGeom>
-          <a:noFill/>
+            <a:off x="609600" y="2946400"/>
+            <a:ext cx="4470400" cy="1422400"/>
+          </a:xfrm>
+          <a:prstGeom prst="rect">
+            <a:avLst/>
+          </a:prstGeom>
+          <a:solidFill>
+            <a:srgbClr val="4C2FBF"/>
+          </a:solidFill>
           <a:ln/>
         </p:spPr>
         <p:txBody>
@@ -1903,19 +1995,21 @@
       </p:sp>
       <p:sp>
         <p:nvSpPr>
-          <p:cNvPr id="4" name="Text 2"/>
+          <p:cNvPr id="6" name="Text 3"/>
           <p:cNvSpPr txBox="1"/>
           <p:nvPr/>
         </p:nvSpPr>
         <p:spPr>
           <a:xfrm>
-            <a:off x="609600" y="4165600"/>
+            <a:off x="609600" y="4572000"/>
             <a:ext cx="5283200" cy="508000"/>
           </a:xfrm>
           <a:prstGeom prst="rect">
             <a:avLst/>
           </a:prstGeom>
-          <a:noFill/>
+          <a:solidFill>
+            <a:srgbClr val="4C2FBF"/>
+          </a:solidFill>
           <a:ln/>
         </p:spPr>
         <p:txBody>
@@ -1942,14 +2036,34 @@
       </p:sp>
       <p:sp>
         <p:nvSpPr>
-          <p:cNvPr id="5" name="Text 3"/>
+          <p:cNvPr id="7" name="Shape 4"/>
+          <p:cNvSpPr/>
+          <p:nvPr/>
+        </p:nvSpPr>
+        <p:spPr>
+          <a:xfrm>
+            <a:off x="609600" y="5791200"/>
+            <a:ext cx="2743200" cy="203200"/>
+          </a:xfrm>
+          <a:prstGeom prst="rect">
+            <a:avLst/>
+          </a:prstGeom>
+          <a:solidFill>
+            <a:srgbClr val="4C2FBF"/>
+          </a:solidFill>
+          <a:ln/>
+        </p:spPr>
+      </p:sp>
+      <p:sp>
+        <p:nvSpPr>
+          <p:cNvPr id="8" name="Text 5"/>
           <p:cNvSpPr txBox="1"/>
           <p:nvPr/>
         </p:nvSpPr>
         <p:spPr>
           <a:xfrm>
             <a:off x="609600" y="5791200"/>
-            <a:ext cx="9753600" cy="304800"/>
+            <a:ext cx="2743200" cy="203200"/>
           </a:xfrm>
           <a:prstGeom prst="rect">
             <a:avLst/>
@@ -2004,10 +2118,54 @@
           <a:chExt cx="0" cy="0"/>
         </a:xfrm>
       </p:grpSpPr>
-      <p:sp>
-        <p:nvSpPr>
-          <p:cNvPr id="2" name="Text 0"/>
+      <p:pic>
+        <p:nvPicPr>
+          <p:cNvPr id="2" name="Image 0" descr="Flugprofil eines kurzen Flugs: steiler Steigflug in Weiß, Reiseflug und Sinkflug gepunktet">    </p:cNvPr>
+          <p:cNvPicPr>
+            <a:picLocks noChangeAspect="1"/>
+          </p:cNvPicPr>
+          <p:nvPr/>
+        </p:nvPicPr>
+        <p:blipFill>
+          <a:blip r:embed="rId1"/>
+          <a:stretch>
+            <a:fillRect/>
+          </a:stretch>
+        </p:blipFill>
+        <p:spPr>
+          <a:xfrm>
+            <a:off x="0" y="0"/>
+            <a:ext cx="12192000" cy="6858000"/>
+          </a:xfrm>
+          <a:prstGeom prst="rect">
+            <a:avLst/>
+          </a:prstGeom>
+        </p:spPr>
+      </p:pic>
+      <p:sp>
+        <p:nvSpPr>
+          <p:cNvPr id="3" name="Shape 0"/>
           <p:cNvSpPr/>
+          <p:nvPr/>
+        </p:nvSpPr>
+        <p:spPr>
+          <a:xfrm>
+            <a:off x="609600" y="609600"/>
+            <a:ext cx="6096000" cy="1320800"/>
+          </a:xfrm>
+          <a:prstGeom prst="rect">
+            <a:avLst/>
+          </a:prstGeom>
+          <a:solidFill>
+            <a:srgbClr val="4C2FBF"/>
+          </a:solidFill>
+          <a:ln/>
+        </p:spPr>
+      </p:sp>
+      <p:sp>
+        <p:nvSpPr>
+          <p:cNvPr id="4" name="Text 0"/>
+          <p:cNvSpPr/>
           <p:nvPr>
             <p:ph idx="100" type="title" hasCustomPrompt="1"/>
           </p:nvPr>
@@ -2015,7 +2173,7 @@
         <p:spPr>
           <a:xfrm>
             <a:off x="609600" y="609600"/>
-            <a:ext cx="10972800" cy="711200"/>
+            <a:ext cx="6096000" cy="1320800"/>
           </a:xfrm>
           <a:prstGeom prst="rect">
             <a:avLst/>
@@ -2047,19 +2205,21 @@
       </p:sp>
       <p:sp>
         <p:nvSpPr>
-          <p:cNvPr id="3" name="Text 1"/>
+          <p:cNvPr id="5" name="Text 2"/>
           <p:cNvSpPr txBox="1"/>
           <p:nvPr/>
         </p:nvSpPr>
         <p:spPr>
           <a:xfrm>
-            <a:off x="609600" y="2438400"/>
-            <a:ext cx="4470400" cy="1524000"/>
-          </a:xfrm>
-          <a:prstGeom prst="rect">
-            <a:avLst/>
-          </a:prstGeom>
-          <a:noFill/>
+            <a:off x="609600" y="2946400"/>
+            <a:ext cx="4470400" cy="1422400"/>
+          </a:xfrm>
+          <a:prstGeom prst="rect">
+            <a:avLst/>
+          </a:prstGeom>
+          <a:solidFill>
+            <a:srgbClr val="4C2FBF"/>
+          </a:solidFill>
           <a:ln/>
         </p:spPr>
         <p:txBody>
@@ -2086,19 +2246,21 @@
       </p:sp>
       <p:sp>
         <p:nvSpPr>
-          <p:cNvPr id="4" name="Text 2"/>
+          <p:cNvPr id="6" name="Text 3"/>
           <p:cNvSpPr txBox="1"/>
           <p:nvPr/>
         </p:nvSpPr>
         <p:spPr>
           <a:xfrm>
-            <a:off x="609600" y="4165600"/>
+            <a:off x="609600" y="4572000"/>
             <a:ext cx="5283200" cy="508000"/>
           </a:xfrm>
           <a:prstGeom prst="rect">
             <a:avLst/>
           </a:prstGeom>
-          <a:noFill/>
+          <a:solidFill>
+            <a:srgbClr val="4C2FBF"/>
+          </a:solidFill>
           <a:ln/>
         </p:spPr>
         <p:txBody>
@@ -2125,14 +2287,34 @@
       </p:sp>
       <p:sp>
         <p:nvSpPr>
-          <p:cNvPr id="5" name="Text 3"/>
+          <p:cNvPr id="7" name="Shape 4"/>
+          <p:cNvSpPr/>
+          <p:nvPr/>
+        </p:nvSpPr>
+        <p:spPr>
+          <a:xfrm>
+            <a:off x="609600" y="5791200"/>
+            <a:ext cx="2743200" cy="203200"/>
+          </a:xfrm>
+          <a:prstGeom prst="rect">
+            <a:avLst/>
+          </a:prstGeom>
+          <a:solidFill>
+            <a:srgbClr val="4C2FBF"/>
+          </a:solidFill>
+          <a:ln/>
+        </p:spPr>
+      </p:sp>
+      <p:sp>
+        <p:nvSpPr>
+          <p:cNvPr id="8" name="Text 5"/>
           <p:cNvSpPr txBox="1"/>
           <p:nvPr/>
         </p:nvSpPr>
         <p:spPr>
           <a:xfrm>
             <a:off x="609600" y="5791200"/>
-            <a:ext cx="9753600" cy="304800"/>
+            <a:ext cx="2743200" cy="203200"/>
           </a:xfrm>
           <a:prstGeom prst="rect">
             <a:avLst/>
@@ -2187,10 +2369,54 @@
           <a:chExt cx="0" cy="0"/>
         </a:xfrm>
       </p:grpSpPr>
-      <p:sp>
-        <p:nvSpPr>
-          <p:cNvPr id="2" name="Text 0"/>
+      <p:pic>
+        <p:nvPicPr>
+          <p:cNvPr id="2" name="Image 0" descr="Zwei Säulen: Turboprop hoch, E-Flugzeug um 22 Prozent niedriger">    </p:cNvPr>
+          <p:cNvPicPr>
+            <a:picLocks noChangeAspect="1"/>
+          </p:cNvPicPr>
+          <p:nvPr/>
+        </p:nvPicPr>
+        <p:blipFill>
+          <a:blip r:embed="rId1"/>
+          <a:stretch>
+            <a:fillRect/>
+          </a:stretch>
+        </p:blipFill>
+        <p:spPr>
+          <a:xfrm>
+            <a:off x="0" y="0"/>
+            <a:ext cx="12192000" cy="6858000"/>
+          </a:xfrm>
+          <a:prstGeom prst="rect">
+            <a:avLst/>
+          </a:prstGeom>
+        </p:spPr>
+      </p:pic>
+      <p:sp>
+        <p:nvSpPr>
+          <p:cNvPr id="3" name="Shape 0"/>
           <p:cNvSpPr/>
+          <p:nvPr/>
+        </p:nvSpPr>
+        <p:spPr>
+          <a:xfrm>
+            <a:off x="609600" y="609600"/>
+            <a:ext cx="6096000" cy="1320800"/>
+          </a:xfrm>
+          <a:prstGeom prst="rect">
+            <a:avLst/>
+          </a:prstGeom>
+          <a:solidFill>
+            <a:srgbClr val="4C2FBF"/>
+          </a:solidFill>
+          <a:ln/>
+        </p:spPr>
+      </p:sp>
+      <p:sp>
+        <p:nvSpPr>
+          <p:cNvPr id="4" name="Text 0"/>
+          <p:cNvSpPr/>
           <p:nvPr>
             <p:ph idx="100" type="title" hasCustomPrompt="1"/>
           </p:nvPr>
@@ -2198,7 +2424,7 @@
         <p:spPr>
           <a:xfrm>
             <a:off x="609600" y="609600"/>
-            <a:ext cx="10972800" cy="711200"/>
+            <a:ext cx="6096000" cy="1320800"/>
           </a:xfrm>
           <a:prstGeom prst="rect">
             <a:avLst/>
@@ -2230,19 +2456,21 @@
       </p:sp>
       <p:sp>
         <p:nvSpPr>
-          <p:cNvPr id="3" name="Text 1"/>
+          <p:cNvPr id="5" name="Text 2"/>
           <p:cNvSpPr txBox="1"/>
           <p:nvPr/>
         </p:nvSpPr>
         <p:spPr>
           <a:xfrm>
-            <a:off x="609600" y="2438400"/>
-            <a:ext cx="4470400" cy="1524000"/>
-          </a:xfrm>
-          <a:prstGeom prst="rect">
-            <a:avLst/>
-          </a:prstGeom>
-          <a:noFill/>
+            <a:off x="609600" y="2946400"/>
+            <a:ext cx="4470400" cy="1422400"/>
+          </a:xfrm>
+          <a:prstGeom prst="rect">
+            <a:avLst/>
+          </a:prstGeom>
+          <a:solidFill>
+            <a:srgbClr val="4C2FBF"/>
+          </a:solidFill>
           <a:ln/>
         </p:spPr>
         <p:txBody>
@@ -2269,19 +2497,21 @@
       </p:sp>
       <p:sp>
         <p:nvSpPr>
-          <p:cNvPr id="4" name="Text 2"/>
+          <p:cNvPr id="6" name="Text 3"/>
           <p:cNvSpPr txBox="1"/>
           <p:nvPr/>
         </p:nvSpPr>
         <p:spPr>
           <a:xfrm>
-            <a:off x="609600" y="4165600"/>
+            <a:off x="609600" y="4572000"/>
             <a:ext cx="5283200" cy="508000"/>
           </a:xfrm>
           <a:prstGeom prst="rect">
             <a:avLst/>
           </a:prstGeom>
-          <a:noFill/>
+          <a:solidFill>
+            <a:srgbClr val="4C2FBF"/>
+          </a:solidFill>
           <a:ln/>
         </p:spPr>
         <p:txBody>
@@ -2308,14 +2538,34 @@
       </p:sp>
       <p:sp>
         <p:nvSpPr>
-          <p:cNvPr id="5" name="Text 3"/>
+          <p:cNvPr id="7" name="Shape 4"/>
+          <p:cNvSpPr/>
+          <p:nvPr/>
+        </p:nvSpPr>
+        <p:spPr>
+          <a:xfrm>
+            <a:off x="609600" y="5791200"/>
+            <a:ext cx="2743200" cy="203200"/>
+          </a:xfrm>
+          <a:prstGeom prst="rect">
+            <a:avLst/>
+          </a:prstGeom>
+          <a:solidFill>
+            <a:srgbClr val="4C2FBF"/>
+          </a:solidFill>
+          <a:ln/>
+        </p:spPr>
+      </p:sp>
+      <p:sp>
+        <p:nvSpPr>
+          <p:cNvPr id="8" name="Text 5"/>
           <p:cNvSpPr txBox="1"/>
           <p:nvPr/>
         </p:nvSpPr>
         <p:spPr>
           <a:xfrm>
             <a:off x="609600" y="5791200"/>
-            <a:ext cx="9753600" cy="304800"/>
+            <a:ext cx="2743200" cy="203200"/>
           </a:xfrm>
           <a:prstGeom prst="rect">
             <a:avLst/>
@@ -2370,10 +2620,54 @@
           <a:chExt cx="0" cy="0"/>
         </a:xfrm>
       </p:grpSpPr>
-      <p:sp>
-        <p:nvSpPr>
-          <p:cNvPr id="2" name="Text 0"/>
+      <p:pic>
+        <p:nvPicPr>
+          <p:cNvPr id="2" name="Image 0" descr="Konzentrische Schallwellen um ein Flugzeug: weiß fünf Ringe für 67 Dezibel, gepunktet zwei weitere für 82 Dezibel">    </p:cNvPr>
+          <p:cNvPicPr>
+            <a:picLocks noChangeAspect="1"/>
+          </p:cNvPicPr>
+          <p:nvPr/>
+        </p:nvPicPr>
+        <p:blipFill>
+          <a:blip r:embed="rId1"/>
+          <a:stretch>
+            <a:fillRect/>
+          </a:stretch>
+        </p:blipFill>
+        <p:spPr>
+          <a:xfrm>
+            <a:off x="0" y="0"/>
+            <a:ext cx="12192000" cy="6858000"/>
+          </a:xfrm>
+          <a:prstGeom prst="rect">
+            <a:avLst/>
+          </a:prstGeom>
+        </p:spPr>
+      </p:pic>
+      <p:sp>
+        <p:nvSpPr>
+          <p:cNvPr id="3" name="Shape 0"/>
           <p:cNvSpPr/>
+          <p:nvPr/>
+        </p:nvSpPr>
+        <p:spPr>
+          <a:xfrm>
+            <a:off x="609600" y="609600"/>
+            <a:ext cx="6096000" cy="1320800"/>
+          </a:xfrm>
+          <a:prstGeom prst="rect">
+            <a:avLst/>
+          </a:prstGeom>
+          <a:solidFill>
+            <a:srgbClr val="4C2FBF"/>
+          </a:solidFill>
+          <a:ln/>
+        </p:spPr>
+      </p:sp>
+      <p:sp>
+        <p:nvSpPr>
+          <p:cNvPr id="4" name="Text 0"/>
+          <p:cNvSpPr/>
           <p:nvPr>
             <p:ph idx="100" type="title" hasCustomPrompt="1"/>
           </p:nvPr>
@@ -2381,7 +2675,7 @@
         <p:spPr>
           <a:xfrm>
             <a:off x="609600" y="609600"/>
-            <a:ext cx="10972800" cy="711200"/>
+            <a:ext cx="6096000" cy="1320800"/>
           </a:xfrm>
           <a:prstGeom prst="rect">
             <a:avLst/>
@@ -2413,19 +2707,21 @@
       </p:sp>
       <p:sp>
         <p:nvSpPr>
-          <p:cNvPr id="3" name="Text 1"/>
+          <p:cNvPr id="5" name="Text 2"/>
           <p:cNvSpPr txBox="1"/>
           <p:nvPr/>
         </p:nvSpPr>
         <p:spPr>
           <a:xfrm>
-            <a:off x="609600" y="2438400"/>
-            <a:ext cx="4470400" cy="1524000"/>
-          </a:xfrm>
-          <a:prstGeom prst="rect">
-            <a:avLst/>
-          </a:prstGeom>
-          <a:noFill/>
+            <a:off x="609600" y="2946400"/>
+            <a:ext cx="4470400" cy="1422400"/>
+          </a:xfrm>
+          <a:prstGeom prst="rect">
+            <a:avLst/>
+          </a:prstGeom>
+          <a:solidFill>
+            <a:srgbClr val="4C2FBF"/>
+          </a:solidFill>
           <a:ln/>
         </p:spPr>
         <p:txBody>
@@ -2452,19 +2748,21 @@
       </p:sp>
       <p:sp>
         <p:nvSpPr>
-          <p:cNvPr id="4" name="Text 2"/>
+          <p:cNvPr id="6" name="Text 3"/>
           <p:cNvSpPr txBox="1"/>
           <p:nvPr/>
         </p:nvSpPr>
         <p:spPr>
           <a:xfrm>
-            <a:off x="609600" y="4165600"/>
+            <a:off x="609600" y="4572000"/>
             <a:ext cx="5283200" cy="508000"/>
           </a:xfrm>
           <a:prstGeom prst="rect">
             <a:avLst/>
           </a:prstGeom>
-          <a:noFill/>
+          <a:solidFill>
+            <a:srgbClr val="4C2FBF"/>
+          </a:solidFill>
           <a:ln/>
         </p:spPr>
         <p:txBody>
@@ -2491,14 +2789,34 @@
       </p:sp>
       <p:sp>
         <p:nvSpPr>
-          <p:cNvPr id="5" name="Text 3"/>
+          <p:cNvPr id="7" name="Shape 4"/>
+          <p:cNvSpPr/>
+          <p:nvPr/>
+        </p:nvSpPr>
+        <p:spPr>
+          <a:xfrm>
+            <a:off x="609600" y="5791200"/>
+            <a:ext cx="2743200" cy="203200"/>
+          </a:xfrm>
+          <a:prstGeom prst="rect">
+            <a:avLst/>
+          </a:prstGeom>
+          <a:solidFill>
+            <a:srgbClr val="4C2FBF"/>
+          </a:solidFill>
+          <a:ln/>
+        </p:spPr>
+      </p:sp>
+      <p:sp>
+        <p:nvSpPr>
+          <p:cNvPr id="8" name="Text 5"/>
           <p:cNvSpPr txBox="1"/>
           <p:nvPr/>
         </p:nvSpPr>
         <p:spPr>
           <a:xfrm>
             <a:off x="609600" y="5791200"/>
-            <a:ext cx="9753600" cy="304800"/>
+            <a:ext cx="2743200" cy="203200"/>
           </a:xfrm>
           <a:prstGeom prst="rect">
             <a:avLst/>
@@ -2553,10 +2871,54 @@
           <a:chExt cx="0" cy="0"/>
         </a:xfrm>
       </p:grpSpPr>
-      <p:sp>
-        <p:nvSpPr>
-          <p:cNvPr id="2" name="Text 0"/>
+      <p:pic>
+        <p:nvPicPr>
+          <p:cNvPr id="2" name="Image 0" descr="Reichweitenring um einen Flughafen mit einem Flugzeug am Rand des weißen Rings">    </p:cNvPr>
+          <p:cNvPicPr>
+            <a:picLocks noChangeAspect="1"/>
+          </p:cNvPicPr>
+          <p:nvPr/>
+        </p:nvPicPr>
+        <p:blipFill>
+          <a:blip r:embed="rId1"/>
+          <a:stretch>
+            <a:fillRect/>
+          </a:stretch>
+        </p:blipFill>
+        <p:spPr>
+          <a:xfrm>
+            <a:off x="0" y="0"/>
+            <a:ext cx="12192000" cy="6858000"/>
+          </a:xfrm>
+          <a:prstGeom prst="rect">
+            <a:avLst/>
+          </a:prstGeom>
+        </p:spPr>
+      </p:pic>
+      <p:sp>
+        <p:nvSpPr>
+          <p:cNvPr id="3" name="Shape 0"/>
           <p:cNvSpPr/>
+          <p:nvPr/>
+        </p:nvSpPr>
+        <p:spPr>
+          <a:xfrm>
+            <a:off x="609600" y="609600"/>
+            <a:ext cx="6096000" cy="1320800"/>
+          </a:xfrm>
+          <a:prstGeom prst="rect">
+            <a:avLst/>
+          </a:prstGeom>
+          <a:solidFill>
+            <a:srgbClr val="4C2FBF"/>
+          </a:solidFill>
+          <a:ln/>
+        </p:spPr>
+      </p:sp>
+      <p:sp>
+        <p:nvSpPr>
+          <p:cNvPr id="4" name="Text 0"/>
+          <p:cNvSpPr/>
           <p:nvPr>
             <p:ph idx="100" type="title" hasCustomPrompt="1"/>
           </p:nvPr>
@@ -2564,7 +2926,7 @@
         <p:spPr>
           <a:xfrm>
             <a:off x="609600" y="609600"/>
-            <a:ext cx="10972800" cy="711200"/>
+            <a:ext cx="6096000" cy="1320800"/>
           </a:xfrm>
           <a:prstGeom prst="rect">
             <a:avLst/>
@@ -2596,19 +2958,21 @@
       </p:sp>
       <p:sp>
         <p:nvSpPr>
-          <p:cNvPr id="3" name="Text 1"/>
+          <p:cNvPr id="5" name="Text 2"/>
           <p:cNvSpPr txBox="1"/>
           <p:nvPr/>
         </p:nvSpPr>
         <p:spPr>
           <a:xfrm>
-            <a:off x="609600" y="2438400"/>
-            <a:ext cx="4470400" cy="1524000"/>
-          </a:xfrm>
-          <a:prstGeom prst="rect">
-            <a:avLst/>
-          </a:prstGeom>
-          <a:noFill/>
+            <a:off x="609600" y="2946400"/>
+            <a:ext cx="4470400" cy="1422400"/>
+          </a:xfrm>
+          <a:prstGeom prst="rect">
+            <a:avLst/>
+          </a:prstGeom>
+          <a:solidFill>
+            <a:srgbClr val="4C2FBF"/>
+          </a:solidFill>
           <a:ln/>
         </p:spPr>
         <p:txBody>
@@ -2635,19 +2999,21 @@
       </p:sp>
       <p:sp>
         <p:nvSpPr>
-          <p:cNvPr id="4" name="Text 2"/>
+          <p:cNvPr id="6" name="Text 3"/>
           <p:cNvSpPr txBox="1"/>
           <p:nvPr/>
         </p:nvSpPr>
         <p:spPr>
           <a:xfrm>
-            <a:off x="609600" y="4165600"/>
+            <a:off x="609600" y="4572000"/>
             <a:ext cx="5283200" cy="508000"/>
           </a:xfrm>
           <a:prstGeom prst="rect">
             <a:avLst/>
           </a:prstGeom>
-          <a:noFill/>
+          <a:solidFill>
+            <a:srgbClr val="4C2FBF"/>
+          </a:solidFill>
           <a:ln/>
         </p:spPr>
         <p:txBody>
@@ -2674,14 +3040,34 @@
       </p:sp>
       <p:sp>
         <p:nvSpPr>
-          <p:cNvPr id="5" name="Text 3"/>
+          <p:cNvPr id="7" name="Shape 4"/>
+          <p:cNvSpPr/>
+          <p:nvPr/>
+        </p:nvSpPr>
+        <p:spPr>
+          <a:xfrm>
+            <a:off x="609600" y="5791200"/>
+            <a:ext cx="2743200" cy="203200"/>
+          </a:xfrm>
+          <a:prstGeom prst="rect">
+            <a:avLst/>
+          </a:prstGeom>
+          <a:solidFill>
+            <a:srgbClr val="4C2FBF"/>
+          </a:solidFill>
+          <a:ln/>
+        </p:spPr>
+      </p:sp>
+      <p:sp>
+        <p:nvSpPr>
+          <p:cNvPr id="8" name="Text 5"/>
           <p:cNvSpPr txBox="1"/>
           <p:nvPr/>
         </p:nvSpPr>
         <p:spPr>
           <a:xfrm>
             <a:off x="609600" y="5791200"/>
-            <a:ext cx="9753600" cy="304800"/>
+            <a:ext cx="2743200" cy="203200"/>
           </a:xfrm>
           <a:prstGeom prst="rect">
             <a:avLst/>
@@ -2736,10 +3122,54 @@
           <a:chExt cx="0" cy="0"/>
         </a:xfrm>
       </p:grpSpPr>
-      <p:sp>
-        <p:nvSpPr>
-          <p:cNvPr id="2" name="Text 0"/>
+      <p:pic>
+        <p:nvPicPr>
+          <p:cNvPr id="2" name="Image 0" descr="Streckennetz mit 30 Strecken um einen Drehkreuz-Flughafen: 14 weiße Strecken liegen innerhalb des Rings von 320 Kilometern, 16 gepunktete außerhalb">    </p:cNvPr>
+          <p:cNvPicPr>
+            <a:picLocks noChangeAspect="1"/>
+          </p:cNvPicPr>
+          <p:nvPr/>
+        </p:nvPicPr>
+        <p:blipFill>
+          <a:blip r:embed="rId1"/>
+          <a:stretch>
+            <a:fillRect/>
+          </a:stretch>
+        </p:blipFill>
+        <p:spPr>
+          <a:xfrm>
+            <a:off x="0" y="0"/>
+            <a:ext cx="12192000" cy="6858000"/>
+          </a:xfrm>
+          <a:prstGeom prst="rect">
+            <a:avLst/>
+          </a:prstGeom>
+        </p:spPr>
+      </p:pic>
+      <p:sp>
+        <p:nvSpPr>
+          <p:cNvPr id="3" name="Shape 0"/>
           <p:cNvSpPr/>
+          <p:nvPr/>
+        </p:nvSpPr>
+        <p:spPr>
+          <a:xfrm>
+            <a:off x="609600" y="609600"/>
+            <a:ext cx="6096000" cy="1320800"/>
+          </a:xfrm>
+          <a:prstGeom prst="rect">
+            <a:avLst/>
+          </a:prstGeom>
+          <a:solidFill>
+            <a:srgbClr val="4C2FBF"/>
+          </a:solidFill>
+          <a:ln/>
+        </p:spPr>
+      </p:sp>
+      <p:sp>
+        <p:nvSpPr>
+          <p:cNvPr id="4" name="Text 0"/>
+          <p:cNvSpPr/>
           <p:nvPr>
             <p:ph idx="100" type="title" hasCustomPrompt="1"/>
           </p:nvPr>
@@ -2747,7 +3177,7 @@
         <p:spPr>
           <a:xfrm>
             <a:off x="609600" y="609600"/>
-            <a:ext cx="10972800" cy="711200"/>
+            <a:ext cx="6096000" cy="1320800"/>
           </a:xfrm>
           <a:prstGeom prst="rect">
             <a:avLst/>
@@ -2779,721 +3209,21 @@
       </p:sp>
       <p:sp>
         <p:nvSpPr>
-          <p:cNvPr id="3" name="Shape 1"/>
-          <p:cNvSpPr/>
-          <p:nvPr/>
-        </p:nvSpPr>
-        <p:spPr>
-          <a:xfrm>
-            <a:off x="609600" y="2438400"/>
-            <a:ext cx="304800" cy="304800"/>
-          </a:xfrm>
-          <a:prstGeom prst="rect">
-            <a:avLst/>
-          </a:prstGeom>
-          <a:solidFill>
-            <a:srgbClr val="FFFFFF"/>
-          </a:solidFill>
-          <a:ln w="19050">
-            <a:solidFill>
-              <a:srgbClr val="FFFFFF"/>
-            </a:solidFill>
-            <a:prstDash val="solid"/>
-          </a:ln>
-        </p:spPr>
-      </p:sp>
-      <p:sp>
-        <p:nvSpPr>
-          <p:cNvPr id="4" name="Shape 2"/>
-          <p:cNvSpPr/>
-          <p:nvPr/>
-        </p:nvSpPr>
-        <p:spPr>
-          <a:xfrm>
-            <a:off x="1016000" y="2438400"/>
-            <a:ext cx="304800" cy="304800"/>
-          </a:xfrm>
-          <a:prstGeom prst="rect">
-            <a:avLst/>
-          </a:prstGeom>
-          <a:solidFill>
-            <a:srgbClr val="FFFFFF"/>
-          </a:solidFill>
-          <a:ln w="19050">
-            <a:solidFill>
-              <a:srgbClr val="FFFFFF"/>
-            </a:solidFill>
-            <a:prstDash val="solid"/>
-          </a:ln>
-        </p:spPr>
-      </p:sp>
-      <p:sp>
-        <p:nvSpPr>
-          <p:cNvPr id="5" name="Shape 3"/>
-          <p:cNvSpPr/>
-          <p:nvPr/>
-        </p:nvSpPr>
-        <p:spPr>
-          <a:xfrm>
-            <a:off x="1422400" y="2438400"/>
-            <a:ext cx="304800" cy="304800"/>
-          </a:xfrm>
-          <a:prstGeom prst="rect">
-            <a:avLst/>
-          </a:prstGeom>
-          <a:solidFill>
-            <a:srgbClr val="FFFFFF"/>
-          </a:solidFill>
-          <a:ln w="19050">
-            <a:solidFill>
-              <a:srgbClr val="FFFFFF"/>
-            </a:solidFill>
-            <a:prstDash val="solid"/>
-          </a:ln>
-        </p:spPr>
-      </p:sp>
-      <p:sp>
-        <p:nvSpPr>
-          <p:cNvPr id="6" name="Shape 4"/>
-          <p:cNvSpPr/>
-          <p:nvPr/>
-        </p:nvSpPr>
-        <p:spPr>
-          <a:xfrm>
-            <a:off x="1828800" y="2438400"/>
-            <a:ext cx="304800" cy="304800"/>
-          </a:xfrm>
-          <a:prstGeom prst="rect">
-            <a:avLst/>
-          </a:prstGeom>
-          <a:solidFill>
-            <a:srgbClr val="FFFFFF"/>
-          </a:solidFill>
-          <a:ln w="19050">
-            <a:solidFill>
-              <a:srgbClr val="FFFFFF"/>
-            </a:solidFill>
-            <a:prstDash val="solid"/>
-          </a:ln>
-        </p:spPr>
-      </p:sp>
-      <p:sp>
-        <p:nvSpPr>
-          <p:cNvPr id="7" name="Shape 5"/>
-          <p:cNvSpPr/>
-          <p:nvPr/>
-        </p:nvSpPr>
-        <p:spPr>
-          <a:xfrm>
-            <a:off x="2235200" y="2438400"/>
-            <a:ext cx="304800" cy="304800"/>
-          </a:xfrm>
-          <a:prstGeom prst="rect">
-            <a:avLst/>
-          </a:prstGeom>
-          <a:solidFill>
-            <a:srgbClr val="FFFFFF"/>
-          </a:solidFill>
-          <a:ln w="19050">
-            <a:solidFill>
-              <a:srgbClr val="FFFFFF"/>
-            </a:solidFill>
-            <a:prstDash val="solid"/>
-          </a:ln>
-        </p:spPr>
-      </p:sp>
-      <p:sp>
-        <p:nvSpPr>
-          <p:cNvPr id="8" name="Shape 6"/>
-          <p:cNvSpPr/>
-          <p:nvPr/>
-        </p:nvSpPr>
-        <p:spPr>
-          <a:xfrm>
-            <a:off x="2641600" y="2438400"/>
-            <a:ext cx="304800" cy="304800"/>
-          </a:xfrm>
-          <a:prstGeom prst="rect">
-            <a:avLst/>
-          </a:prstGeom>
-          <a:solidFill>
-            <a:srgbClr val="FFFFFF"/>
-          </a:solidFill>
-          <a:ln w="19050">
-            <a:solidFill>
-              <a:srgbClr val="FFFFFF"/>
-            </a:solidFill>
-            <a:prstDash val="solid"/>
-          </a:ln>
-        </p:spPr>
-      </p:sp>
-      <p:sp>
-        <p:nvSpPr>
-          <p:cNvPr id="9" name="Shape 7"/>
-          <p:cNvSpPr/>
-          <p:nvPr/>
-        </p:nvSpPr>
-        <p:spPr>
-          <a:xfrm>
-            <a:off x="3048000" y="2438400"/>
-            <a:ext cx="304800" cy="304800"/>
-          </a:xfrm>
-          <a:prstGeom prst="rect">
-            <a:avLst/>
-          </a:prstGeom>
-          <a:solidFill>
-            <a:srgbClr val="FFFFFF"/>
-          </a:solidFill>
-          <a:ln w="19050">
-            <a:solidFill>
-              <a:srgbClr val="FFFFFF"/>
-            </a:solidFill>
-            <a:prstDash val="solid"/>
-          </a:ln>
-        </p:spPr>
-      </p:sp>
-      <p:sp>
-        <p:nvSpPr>
-          <p:cNvPr id="10" name="Shape 8"/>
-          <p:cNvSpPr/>
-          <p:nvPr/>
-        </p:nvSpPr>
-        <p:spPr>
-          <a:xfrm>
-            <a:off x="3454400" y="2438400"/>
-            <a:ext cx="304800" cy="304800"/>
-          </a:xfrm>
-          <a:prstGeom prst="rect">
-            <a:avLst/>
-          </a:prstGeom>
-          <a:solidFill>
-            <a:srgbClr val="FFFFFF"/>
-          </a:solidFill>
-          <a:ln w="19050">
-            <a:solidFill>
-              <a:srgbClr val="FFFFFF"/>
-            </a:solidFill>
-            <a:prstDash val="solid"/>
-          </a:ln>
-        </p:spPr>
-      </p:sp>
-      <p:sp>
-        <p:nvSpPr>
-          <p:cNvPr id="11" name="Shape 9"/>
-          <p:cNvSpPr/>
-          <p:nvPr/>
-        </p:nvSpPr>
-        <p:spPr>
-          <a:xfrm>
-            <a:off x="3860800" y="2438400"/>
-            <a:ext cx="304800" cy="304800"/>
-          </a:xfrm>
-          <a:prstGeom prst="rect">
-            <a:avLst/>
-          </a:prstGeom>
-          <a:solidFill>
-            <a:srgbClr val="FFFFFF"/>
-          </a:solidFill>
-          <a:ln w="19050">
-            <a:solidFill>
-              <a:srgbClr val="FFFFFF"/>
-            </a:solidFill>
-            <a:prstDash val="solid"/>
-          </a:ln>
-        </p:spPr>
-      </p:sp>
-      <p:sp>
-        <p:nvSpPr>
-          <p:cNvPr id="12" name="Shape 10"/>
-          <p:cNvSpPr/>
-          <p:nvPr/>
-        </p:nvSpPr>
-        <p:spPr>
-          <a:xfrm>
-            <a:off x="4267200" y="2438400"/>
-            <a:ext cx="304800" cy="304800"/>
-          </a:xfrm>
-          <a:prstGeom prst="rect">
-            <a:avLst/>
-          </a:prstGeom>
-          <a:solidFill>
-            <a:srgbClr val="FFFFFF"/>
-          </a:solidFill>
-          <a:ln w="19050">
-            <a:solidFill>
-              <a:srgbClr val="FFFFFF"/>
-            </a:solidFill>
-            <a:prstDash val="solid"/>
-          </a:ln>
-        </p:spPr>
-      </p:sp>
-      <p:sp>
-        <p:nvSpPr>
-          <p:cNvPr id="13" name="Shape 11"/>
-          <p:cNvSpPr/>
-          <p:nvPr/>
-        </p:nvSpPr>
-        <p:spPr>
-          <a:xfrm>
-            <a:off x="609600" y="2844800"/>
-            <a:ext cx="304800" cy="304800"/>
-          </a:xfrm>
-          <a:prstGeom prst="rect">
-            <a:avLst/>
-          </a:prstGeom>
-          <a:solidFill>
-            <a:srgbClr val="FFFFFF"/>
-          </a:solidFill>
-          <a:ln w="19050">
-            <a:solidFill>
-              <a:srgbClr val="FFFFFF"/>
-            </a:solidFill>
-            <a:prstDash val="solid"/>
-          </a:ln>
-        </p:spPr>
-      </p:sp>
-      <p:sp>
-        <p:nvSpPr>
-          <p:cNvPr id="14" name="Shape 12"/>
-          <p:cNvSpPr/>
-          <p:nvPr/>
-        </p:nvSpPr>
-        <p:spPr>
-          <a:xfrm>
-            <a:off x="1016000" y="2844800"/>
-            <a:ext cx="304800" cy="304800"/>
-          </a:xfrm>
-          <a:prstGeom prst="rect">
-            <a:avLst/>
-          </a:prstGeom>
-          <a:solidFill>
-            <a:srgbClr val="FFFFFF"/>
-          </a:solidFill>
-          <a:ln w="19050">
-            <a:solidFill>
-              <a:srgbClr val="FFFFFF"/>
-            </a:solidFill>
-            <a:prstDash val="solid"/>
-          </a:ln>
-        </p:spPr>
-      </p:sp>
-      <p:sp>
-        <p:nvSpPr>
-          <p:cNvPr id="15" name="Shape 13"/>
-          <p:cNvSpPr/>
-          <p:nvPr/>
-        </p:nvSpPr>
-        <p:spPr>
-          <a:xfrm>
-            <a:off x="1422400" y="2844800"/>
-            <a:ext cx="304800" cy="304800"/>
-          </a:xfrm>
-          <a:prstGeom prst="rect">
-            <a:avLst/>
-          </a:prstGeom>
-          <a:solidFill>
-            <a:srgbClr val="FFFFFF"/>
-          </a:solidFill>
-          <a:ln w="19050">
-            <a:solidFill>
-              <a:srgbClr val="FFFFFF"/>
-            </a:solidFill>
-            <a:prstDash val="solid"/>
-          </a:ln>
-        </p:spPr>
-      </p:sp>
-      <p:sp>
-        <p:nvSpPr>
-          <p:cNvPr id="16" name="Shape 14"/>
-          <p:cNvSpPr/>
-          <p:nvPr/>
-        </p:nvSpPr>
-        <p:spPr>
-          <a:xfrm>
-            <a:off x="1828800" y="2844800"/>
-            <a:ext cx="304800" cy="304800"/>
-          </a:xfrm>
-          <a:prstGeom prst="rect">
-            <a:avLst/>
-          </a:prstGeom>
-          <a:solidFill>
-            <a:srgbClr val="FFFFFF"/>
-          </a:solidFill>
-          <a:ln w="19050">
-            <a:solidFill>
-              <a:srgbClr val="FFFFFF"/>
-            </a:solidFill>
-            <a:prstDash val="solid"/>
-          </a:ln>
-        </p:spPr>
-      </p:sp>
-      <p:sp>
-        <p:nvSpPr>
-          <p:cNvPr id="17" name="Shape 15"/>
-          <p:cNvSpPr/>
-          <p:nvPr/>
-        </p:nvSpPr>
-        <p:spPr>
-          <a:xfrm>
-            <a:off x="2235200" y="2844800"/>
-            <a:ext cx="304800" cy="304800"/>
-          </a:xfrm>
-          <a:prstGeom prst="rect">
-            <a:avLst/>
-          </a:prstGeom>
-          <a:ln w="19050">
-            <a:solidFill>
-              <a:srgbClr val="FFFFFF"/>
-            </a:solidFill>
-            <a:prstDash val="solid"/>
-          </a:ln>
-        </p:spPr>
-      </p:sp>
-      <p:sp>
-        <p:nvSpPr>
-          <p:cNvPr id="18" name="Shape 16"/>
-          <p:cNvSpPr/>
-          <p:nvPr/>
-        </p:nvSpPr>
-        <p:spPr>
-          <a:xfrm>
-            <a:off x="2641600" y="2844800"/>
-            <a:ext cx="304800" cy="304800"/>
-          </a:xfrm>
-          <a:prstGeom prst="rect">
-            <a:avLst/>
-          </a:prstGeom>
-          <a:ln w="19050">
-            <a:solidFill>
-              <a:srgbClr val="FFFFFF"/>
-            </a:solidFill>
-            <a:prstDash val="solid"/>
-          </a:ln>
-        </p:spPr>
-      </p:sp>
-      <p:sp>
-        <p:nvSpPr>
-          <p:cNvPr id="19" name="Shape 17"/>
-          <p:cNvSpPr/>
-          <p:nvPr/>
-        </p:nvSpPr>
-        <p:spPr>
-          <a:xfrm>
-            <a:off x="3048000" y="2844800"/>
-            <a:ext cx="304800" cy="304800"/>
-          </a:xfrm>
-          <a:prstGeom prst="rect">
-            <a:avLst/>
-          </a:prstGeom>
-          <a:ln w="19050">
-            <a:solidFill>
-              <a:srgbClr val="FFFFFF"/>
-            </a:solidFill>
-            <a:prstDash val="solid"/>
-          </a:ln>
-        </p:spPr>
-      </p:sp>
-      <p:sp>
-        <p:nvSpPr>
-          <p:cNvPr id="20" name="Shape 18"/>
-          <p:cNvSpPr/>
-          <p:nvPr/>
-        </p:nvSpPr>
-        <p:spPr>
-          <a:xfrm>
-            <a:off x="3454400" y="2844800"/>
-            <a:ext cx="304800" cy="304800"/>
-          </a:xfrm>
-          <a:prstGeom prst="rect">
-            <a:avLst/>
-          </a:prstGeom>
-          <a:ln w="19050">
-            <a:solidFill>
-              <a:srgbClr val="FFFFFF"/>
-            </a:solidFill>
-            <a:prstDash val="solid"/>
-          </a:ln>
-        </p:spPr>
-      </p:sp>
-      <p:sp>
-        <p:nvSpPr>
-          <p:cNvPr id="21" name="Shape 19"/>
-          <p:cNvSpPr/>
-          <p:nvPr/>
-        </p:nvSpPr>
-        <p:spPr>
-          <a:xfrm>
-            <a:off x="3860800" y="2844800"/>
-            <a:ext cx="304800" cy="304800"/>
-          </a:xfrm>
-          <a:prstGeom prst="rect">
-            <a:avLst/>
-          </a:prstGeom>
-          <a:ln w="19050">
-            <a:solidFill>
-              <a:srgbClr val="FFFFFF"/>
-            </a:solidFill>
-            <a:prstDash val="solid"/>
-          </a:ln>
-        </p:spPr>
-      </p:sp>
-      <p:sp>
-        <p:nvSpPr>
-          <p:cNvPr id="22" name="Shape 20"/>
-          <p:cNvSpPr/>
-          <p:nvPr/>
-        </p:nvSpPr>
-        <p:spPr>
-          <a:xfrm>
-            <a:off x="4267200" y="2844800"/>
-            <a:ext cx="304800" cy="304800"/>
-          </a:xfrm>
-          <a:prstGeom prst="rect">
-            <a:avLst/>
-          </a:prstGeom>
-          <a:ln w="19050">
-            <a:solidFill>
-              <a:srgbClr val="FFFFFF"/>
-            </a:solidFill>
-            <a:prstDash val="solid"/>
-          </a:ln>
-        </p:spPr>
-      </p:sp>
-      <p:sp>
-        <p:nvSpPr>
-          <p:cNvPr id="23" name="Shape 21"/>
-          <p:cNvSpPr/>
-          <p:nvPr/>
-        </p:nvSpPr>
-        <p:spPr>
-          <a:xfrm>
-            <a:off x="609600" y="3251200"/>
-            <a:ext cx="304800" cy="304800"/>
-          </a:xfrm>
-          <a:prstGeom prst="rect">
-            <a:avLst/>
-          </a:prstGeom>
-          <a:ln w="19050">
-            <a:solidFill>
-              <a:srgbClr val="FFFFFF"/>
-            </a:solidFill>
-            <a:prstDash val="solid"/>
-          </a:ln>
-        </p:spPr>
-      </p:sp>
-      <p:sp>
-        <p:nvSpPr>
-          <p:cNvPr id="24" name="Shape 22"/>
-          <p:cNvSpPr/>
-          <p:nvPr/>
-        </p:nvSpPr>
-        <p:spPr>
-          <a:xfrm>
-            <a:off x="1016000" y="3251200"/>
-            <a:ext cx="304800" cy="304800"/>
-          </a:xfrm>
-          <a:prstGeom prst="rect">
-            <a:avLst/>
-          </a:prstGeom>
-          <a:ln w="19050">
-            <a:solidFill>
-              <a:srgbClr val="FFFFFF"/>
-            </a:solidFill>
-            <a:prstDash val="solid"/>
-          </a:ln>
-        </p:spPr>
-      </p:sp>
-      <p:sp>
-        <p:nvSpPr>
-          <p:cNvPr id="25" name="Shape 23"/>
-          <p:cNvSpPr/>
-          <p:nvPr/>
-        </p:nvSpPr>
-        <p:spPr>
-          <a:xfrm>
-            <a:off x="1422400" y="3251200"/>
-            <a:ext cx="304800" cy="304800"/>
-          </a:xfrm>
-          <a:prstGeom prst="rect">
-            <a:avLst/>
-          </a:prstGeom>
-          <a:ln w="19050">
-            <a:solidFill>
-              <a:srgbClr val="FFFFFF"/>
-            </a:solidFill>
-            <a:prstDash val="solid"/>
-          </a:ln>
-        </p:spPr>
-      </p:sp>
-      <p:sp>
-        <p:nvSpPr>
-          <p:cNvPr id="26" name="Shape 24"/>
-          <p:cNvSpPr/>
-          <p:nvPr/>
-        </p:nvSpPr>
-        <p:spPr>
-          <a:xfrm>
-            <a:off x="1828800" y="3251200"/>
-            <a:ext cx="304800" cy="304800"/>
-          </a:xfrm>
-          <a:prstGeom prst="rect">
-            <a:avLst/>
-          </a:prstGeom>
-          <a:ln w="19050">
-            <a:solidFill>
-              <a:srgbClr val="FFFFFF"/>
-            </a:solidFill>
-            <a:prstDash val="solid"/>
-          </a:ln>
-        </p:spPr>
-      </p:sp>
-      <p:sp>
-        <p:nvSpPr>
-          <p:cNvPr id="27" name="Shape 25"/>
-          <p:cNvSpPr/>
-          <p:nvPr/>
-        </p:nvSpPr>
-        <p:spPr>
-          <a:xfrm>
-            <a:off x="2235200" y="3251200"/>
-            <a:ext cx="304800" cy="304800"/>
-          </a:xfrm>
-          <a:prstGeom prst="rect">
-            <a:avLst/>
-          </a:prstGeom>
-          <a:ln w="19050">
-            <a:solidFill>
-              <a:srgbClr val="FFFFFF"/>
-            </a:solidFill>
-            <a:prstDash val="solid"/>
-          </a:ln>
-        </p:spPr>
-      </p:sp>
-      <p:sp>
-        <p:nvSpPr>
-          <p:cNvPr id="28" name="Shape 26"/>
-          <p:cNvSpPr/>
-          <p:nvPr/>
-        </p:nvSpPr>
-        <p:spPr>
-          <a:xfrm>
-            <a:off x="2641600" y="3251200"/>
-            <a:ext cx="304800" cy="304800"/>
-          </a:xfrm>
-          <a:prstGeom prst="rect">
-            <a:avLst/>
-          </a:prstGeom>
-          <a:ln w="19050">
-            <a:solidFill>
-              <a:srgbClr val="FFFFFF"/>
-            </a:solidFill>
-            <a:prstDash val="solid"/>
-          </a:ln>
-        </p:spPr>
-      </p:sp>
-      <p:sp>
-        <p:nvSpPr>
-          <p:cNvPr id="29" name="Shape 27"/>
-          <p:cNvSpPr/>
-          <p:nvPr/>
-        </p:nvSpPr>
-        <p:spPr>
-          <a:xfrm>
-            <a:off x="3048000" y="3251200"/>
-            <a:ext cx="304800" cy="304800"/>
-          </a:xfrm>
-          <a:prstGeom prst="rect">
-            <a:avLst/>
-          </a:prstGeom>
-          <a:ln w="19050">
-            <a:solidFill>
-              <a:srgbClr val="FFFFFF"/>
-            </a:solidFill>
-            <a:prstDash val="solid"/>
-          </a:ln>
-        </p:spPr>
-      </p:sp>
-      <p:sp>
-        <p:nvSpPr>
-          <p:cNvPr id="30" name="Shape 28"/>
-          <p:cNvSpPr/>
-          <p:nvPr/>
-        </p:nvSpPr>
-        <p:spPr>
-          <a:xfrm>
-            <a:off x="3454400" y="3251200"/>
-            <a:ext cx="304800" cy="304800"/>
-          </a:xfrm>
-          <a:prstGeom prst="rect">
-            <a:avLst/>
-          </a:prstGeom>
-          <a:ln w="19050">
-            <a:solidFill>
-              <a:srgbClr val="FFFFFF"/>
-            </a:solidFill>
-            <a:prstDash val="solid"/>
-          </a:ln>
-        </p:spPr>
-      </p:sp>
-      <p:sp>
-        <p:nvSpPr>
-          <p:cNvPr id="31" name="Shape 29"/>
-          <p:cNvSpPr/>
-          <p:nvPr/>
-        </p:nvSpPr>
-        <p:spPr>
-          <a:xfrm>
-            <a:off x="3860800" y="3251200"/>
-            <a:ext cx="304800" cy="304800"/>
-          </a:xfrm>
-          <a:prstGeom prst="rect">
-            <a:avLst/>
-          </a:prstGeom>
-          <a:ln w="19050">
-            <a:solidFill>
-              <a:srgbClr val="FFFFFF"/>
-            </a:solidFill>
-            <a:prstDash val="solid"/>
-          </a:ln>
-        </p:spPr>
-      </p:sp>
-      <p:sp>
-        <p:nvSpPr>
-          <p:cNvPr id="32" name="Shape 30"/>
-          <p:cNvSpPr/>
-          <p:nvPr/>
-        </p:nvSpPr>
-        <p:spPr>
-          <a:xfrm>
-            <a:off x="4267200" y="3251200"/>
-            <a:ext cx="304800" cy="304800"/>
-          </a:xfrm>
-          <a:prstGeom prst="rect">
-            <a:avLst/>
-          </a:prstGeom>
-          <a:ln w="19050">
-            <a:solidFill>
-              <a:srgbClr val="FFFFFF"/>
-            </a:solidFill>
-            <a:prstDash val="solid"/>
-          </a:ln>
-        </p:spPr>
-      </p:sp>
-      <p:sp>
-        <p:nvSpPr>
-          <p:cNvPr id="33" name="Text 31"/>
+          <p:cNvPr id="5" name="Text 2"/>
           <p:cNvSpPr txBox="1"/>
           <p:nvPr/>
         </p:nvSpPr>
         <p:spPr>
           <a:xfrm>
-            <a:off x="609600" y="3962400"/>
+            <a:off x="609600" y="2946400"/>
             <a:ext cx="5283200" cy="508000"/>
           </a:xfrm>
           <a:prstGeom prst="rect">
             <a:avLst/>
           </a:prstGeom>
-          <a:noFill/>
+          <a:solidFill>
+            <a:srgbClr val="4C2FBF"/>
+          </a:solidFill>
           <a:ln/>
         </p:spPr>
         <p:txBody>
@@ -3520,14 +3250,34 @@
       </p:sp>
       <p:sp>
         <p:nvSpPr>
-          <p:cNvPr id="34" name="Text 32"/>
+          <p:cNvPr id="6" name="Shape 3"/>
+          <p:cNvSpPr/>
+          <p:nvPr/>
+        </p:nvSpPr>
+        <p:spPr>
+          <a:xfrm>
+            <a:off x="609600" y="5791200"/>
+            <a:ext cx="2743200" cy="203200"/>
+          </a:xfrm>
+          <a:prstGeom prst="rect">
+            <a:avLst/>
+          </a:prstGeom>
+          <a:solidFill>
+            <a:srgbClr val="4C2FBF"/>
+          </a:solidFill>
+          <a:ln/>
+        </p:spPr>
+      </p:sp>
+      <p:sp>
+        <p:nvSpPr>
+          <p:cNvPr id="7" name="Text 4"/>
           <p:cNvSpPr txBox="1"/>
           <p:nvPr/>
         </p:nvSpPr>
         <p:spPr>
           <a:xfrm>
             <a:off x="609600" y="5791200"/>
-            <a:ext cx="9753600" cy="304800"/>
+            <a:ext cx="2743200" cy="203200"/>
           </a:xfrm>
           <a:prstGeom prst="rect">
             <a:avLst/>
@@ -3582,10 +3332,54 @@
           <a:chExt cx="0" cy="0"/>
         </a:xfrm>
       </p:grpSpPr>
-      <p:sp>
-        <p:nvSpPr>
-          <p:cNvPr id="2" name="Text 0"/>
+      <p:pic>
+        <p:nvPicPr>
+          <p:cNvPr id="2" name="Image 0" descr="Vier Flugzeuge in Formation über einem Ring">    </p:cNvPr>
+          <p:cNvPicPr>
+            <a:picLocks noChangeAspect="1"/>
+          </p:cNvPicPr>
+          <p:nvPr/>
+        </p:nvPicPr>
+        <p:blipFill>
+          <a:blip r:embed="rId1"/>
+          <a:stretch>
+            <a:fillRect/>
+          </a:stretch>
+        </p:blipFill>
+        <p:spPr>
+          <a:xfrm>
+            <a:off x="0" y="0"/>
+            <a:ext cx="12192000" cy="6858000"/>
+          </a:xfrm>
+          <a:prstGeom prst="rect">
+            <a:avLst/>
+          </a:prstGeom>
+        </p:spPr>
+      </p:pic>
+      <p:sp>
+        <p:nvSpPr>
+          <p:cNvPr id="3" name="Shape 0"/>
           <p:cNvSpPr/>
+          <p:nvPr/>
+        </p:nvSpPr>
+        <p:spPr>
+          <a:xfrm>
+            <a:off x="609600" y="609600"/>
+            <a:ext cx="6096000" cy="1320800"/>
+          </a:xfrm>
+          <a:prstGeom prst="rect">
+            <a:avLst/>
+          </a:prstGeom>
+          <a:solidFill>
+            <a:srgbClr val="4C2FBF"/>
+          </a:solidFill>
+          <a:ln/>
+        </p:spPr>
+      </p:sp>
+      <p:sp>
+        <p:nvSpPr>
+          <p:cNvPr id="4" name="Text 0"/>
+          <p:cNvSpPr/>
           <p:nvPr>
             <p:ph idx="100" type="title" hasCustomPrompt="1"/>
           </p:nvPr>
@@ -3593,7 +3387,7 @@
         <p:spPr>
           <a:xfrm>
             <a:off x="609600" y="609600"/>
-            <a:ext cx="10972800" cy="711200"/>
+            <a:ext cx="6096000" cy="1320800"/>
           </a:xfrm>
           <a:prstGeom prst="rect">
             <a:avLst/>
@@ -3625,19 +3419,21 @@
       </p:sp>
       <p:sp>
         <p:nvSpPr>
-          <p:cNvPr id="3" name="Text 1"/>
+          <p:cNvPr id="5" name="Text 2"/>
           <p:cNvSpPr txBox="1"/>
           <p:nvPr/>
         </p:nvSpPr>
         <p:spPr>
           <a:xfrm>
-            <a:off x="609600" y="2438400"/>
-            <a:ext cx="4470400" cy="1524000"/>
-          </a:xfrm>
-          <a:prstGeom prst="rect">
-            <a:avLst/>
-          </a:prstGeom>
-          <a:noFill/>
+            <a:off x="609600" y="2946400"/>
+            <a:ext cx="4470400" cy="1422400"/>
+          </a:xfrm>
+          <a:prstGeom prst="rect">
+            <a:avLst/>
+          </a:prstGeom>
+          <a:solidFill>
+            <a:srgbClr val="4C2FBF"/>
+          </a:solidFill>
           <a:ln/>
         </p:spPr>
         <p:txBody>
@@ -3664,19 +3460,21 @@
       </p:sp>
       <p:sp>
         <p:nvSpPr>
-          <p:cNvPr id="4" name="Text 2"/>
+          <p:cNvPr id="6" name="Text 3"/>
           <p:cNvSpPr txBox="1"/>
           <p:nvPr/>
         </p:nvSpPr>
         <p:spPr>
           <a:xfrm>
-            <a:off x="609600" y="4165600"/>
+            <a:off x="609600" y="4572000"/>
             <a:ext cx="5283200" cy="508000"/>
           </a:xfrm>
           <a:prstGeom prst="rect">
             <a:avLst/>
           </a:prstGeom>
-          <a:noFill/>
+          <a:solidFill>
+            <a:srgbClr val="4C2FBF"/>
+          </a:solidFill>
           <a:ln/>
         </p:spPr>
         <p:txBody>
